--- a/courseware/DSA_CH08_Internal_Sorting.pptx
+++ b/courseware/DSA_CH08_Internal_Sorting.pptx
@@ -3327,7 +3327,7 @@
                 <a:latin typeface="Segoe UI"/>
                 <a:ea typeface="微软雅黑"/>
               </a:rPr>
-              <a:t>现代化重制版讲义　代码按 C++17 重写，全部可编译、可运行</a:t>
+              <a:t>现代化重制版讲义　代码按 C++17 重写；code/ 全部单元双档编译运行通过</a:t>
             </a:r>
           </a:p>
         </p:txBody>
@@ -14632,7 +14632,7 @@
                 <a:latin typeface="Segoe UI"/>
                 <a:ea typeface="微软雅黑"/>
               </a:rPr>
-              <a:t>习题（完整题面与参考答案见同名讲义）</a:t>
+              <a:t>习题选讲</a:t>
             </a:r>
           </a:p>
         </p:txBody>
@@ -14711,11 +14711,11 @@
                 <a:spcPts val="0"/>
               </a:spcBef>
               <a:spcAft>
-                <a:spcPts val="1240"/>
-              </a:spcAft>
-            </a:pPr>
-            <a:r>
-              <a:rPr sz="2000" b="0" i="0">
+                <a:spcPts val="1085"/>
+              </a:spcAft>
+            </a:pPr>
+            <a:r>
+              <a:rPr sz="1750" b="0" i="0">
                 <a:solidFill>
                   <a:srgbClr val="242A33"/>
                 </a:solidFill>
@@ -14725,7 +14725,7 @@
               <a:t>•  </a:t>
             </a:r>
             <a:r>
-              <a:rPr sz="2000" b="1" i="0">
+              <a:rPr sz="1750" b="1" i="0">
                 <a:solidFill>
                   <a:srgbClr val="12395B"/>
                 </a:solidFill>
@@ -14735,7 +14735,7 @@
               <a:t>手算</a:t>
             </a:r>
             <a:r>
-              <a:rPr sz="2000" b="0" i="0">
+              <a:rPr sz="1750" b="0" i="0">
                 <a:solidFill>
                   <a:srgbClr val="242A33"/>
                 </a:solidFill>
@@ -14754,11 +14754,11 @@
                 <a:spcPts val="0"/>
               </a:spcBef>
               <a:spcAft>
-                <a:spcPts val="1240"/>
-              </a:spcAft>
-            </a:pPr>
-            <a:r>
-              <a:rPr sz="2000" b="0" i="0">
+                <a:spcPts val="1085"/>
+              </a:spcAft>
+            </a:pPr>
+            <a:r>
+              <a:rPr sz="1750" b="0" i="0">
                 <a:solidFill>
                   <a:srgbClr val="242A33"/>
                 </a:solidFill>
@@ -14768,7 +14768,7 @@
               <a:t>•  </a:t>
             </a:r>
             <a:r>
-              <a:rPr sz="2000" b="1" i="0">
+              <a:rPr sz="1750" b="1" i="0">
                 <a:solidFill>
                   <a:srgbClr val="12395B"/>
                 </a:solidFill>
@@ -14778,7 +14778,7 @@
               <a:t>稳定性</a:t>
             </a:r>
             <a:r>
-              <a:rPr sz="2000" b="0" i="0">
+              <a:rPr sz="1750" b="0" i="0">
                 <a:solidFill>
                   <a:srgbClr val="242A33"/>
                 </a:solidFill>
@@ -14788,7 +14788,7 @@
               <a:t>　逐一判断本章各算法是否稳定，</a:t>
             </a:r>
             <a:r>
-              <a:rPr sz="2000" b="1" i="0">
+              <a:rPr sz="1750" b="1" i="0">
                 <a:solidFill>
                   <a:srgbClr val="12395B"/>
                 </a:solidFill>
@@ -14807,11 +14807,11 @@
                 <a:spcPts val="0"/>
               </a:spcBef>
               <a:spcAft>
-                <a:spcPts val="1240"/>
-              </a:spcAft>
-            </a:pPr>
-            <a:r>
-              <a:rPr sz="2000" b="0" i="0">
+                <a:spcPts val="1085"/>
+              </a:spcAft>
+            </a:pPr>
+            <a:r>
+              <a:rPr sz="1750" b="0" i="0">
                 <a:solidFill>
                   <a:srgbClr val="242A33"/>
                 </a:solidFill>
@@ -14821,7 +14821,7 @@
               <a:t>•  </a:t>
             </a:r>
             <a:r>
-              <a:rPr sz="2000" b="1" i="0">
+              <a:rPr sz="1750" b="1" i="0">
                 <a:solidFill>
                   <a:srgbClr val="12395B"/>
                 </a:solidFill>
@@ -14831,7 +14831,7 @@
               <a:t>下界</a:t>
             </a:r>
             <a:r>
-              <a:rPr sz="2000" b="0" i="0">
+              <a:rPr sz="1750" b="0" i="0">
                 <a:solidFill>
                   <a:srgbClr val="242A33"/>
                 </a:solidFill>
@@ -14841,7 +14841,7 @@
               <a:t>　用判定树证明比较排序的 </a:t>
             </a:r>
             <a:r>
-              <a:rPr sz="1879" b="0" i="0">
+              <a:rPr sz="1645" b="0" i="0">
                 <a:solidFill>
                   <a:srgbClr val="242A33"/>
                 </a:solidFill>
@@ -14851,7 +14851,7 @@
               <a:t>Ω(n log n)</a:t>
             </a:r>
             <a:r>
-              <a:rPr sz="2000" b="0" i="0">
+              <a:rPr sz="1750" b="0" i="0">
                 <a:solidFill>
                   <a:srgbClr val="242A33"/>
                 </a:solidFill>
@@ -14870,11 +14870,11 @@
                 <a:spcPts val="0"/>
               </a:spcBef>
               <a:spcAft>
-                <a:spcPts val="1240"/>
-              </a:spcAft>
-            </a:pPr>
-            <a:r>
-              <a:rPr sz="2000" b="0" i="0">
+                <a:spcPts val="1085"/>
+              </a:spcAft>
+            </a:pPr>
+            <a:r>
+              <a:rPr sz="1750" b="0" i="0">
                 <a:solidFill>
                   <a:srgbClr val="242A33"/>
                 </a:solidFill>
@@ -14884,7 +14884,7 @@
               <a:t>•  </a:t>
             </a:r>
             <a:r>
-              <a:rPr sz="2000" b="1" i="0">
+              <a:rPr sz="1750" b="1" i="0">
                 <a:solidFill>
                   <a:srgbClr val="12395B"/>
                 </a:solidFill>
@@ -14894,7 +14894,7 @@
               <a:t>快排</a:t>
             </a:r>
             <a:r>
-              <a:rPr sz="2000" b="0" i="0">
+              <a:rPr sz="1750" b="0" i="0">
                 <a:solidFill>
                   <a:srgbClr val="242A33"/>
                 </a:solidFill>
@@ -14913,11 +14913,11 @@
                 <a:spcPts val="0"/>
               </a:spcBef>
               <a:spcAft>
-                <a:spcPts val="1240"/>
-              </a:spcAft>
-            </a:pPr>
-            <a:r>
-              <a:rPr sz="2000" b="0" i="0">
+                <a:spcPts val="1085"/>
+              </a:spcAft>
+            </a:pPr>
+            <a:r>
+              <a:rPr sz="1750" b="0" i="0">
                 <a:solidFill>
                   <a:srgbClr val="242A33"/>
                 </a:solidFill>
@@ -14927,7 +14927,7 @@
               <a:t>•  </a:t>
             </a:r>
             <a:r>
-              <a:rPr sz="2000" b="1" i="0">
+              <a:rPr sz="1750" b="1" i="0">
                 <a:solidFill>
                   <a:srgbClr val="12395B"/>
                 </a:solidFill>
@@ -14937,7 +14937,7 @@
               <a:t>基数</a:t>
             </a:r>
             <a:r>
-              <a:rPr sz="2000" b="0" i="0">
+              <a:rPr sz="1750" b="0" i="0">
                 <a:solidFill>
                   <a:srgbClr val="242A33"/>
                 </a:solidFill>
@@ -14956,11 +14956,11 @@
                 <a:spcPts val="0"/>
               </a:spcBef>
               <a:spcAft>
-                <a:spcPts val="1240"/>
-              </a:spcAft>
-            </a:pPr>
-            <a:r>
-              <a:rPr sz="2000" b="0" i="0">
+                <a:spcPts val="1085"/>
+              </a:spcAft>
+            </a:pPr>
+            <a:r>
+              <a:rPr sz="1750" b="0" i="0">
                 <a:solidFill>
                   <a:srgbClr val="242A33"/>
                 </a:solidFill>
@@ -14970,7 +14970,7 @@
               <a:t>•  </a:t>
             </a:r>
             <a:r>
-              <a:rPr sz="2000" b="1" i="0">
+              <a:rPr sz="1750" b="1" i="0">
                 <a:solidFill>
                   <a:srgbClr val="12395B"/>
                 </a:solidFill>
@@ -14980,7 +14980,7 @@
               <a:t>原书 11</a:t>
             </a:r>
             <a:r>
-              <a:rPr sz="2000" b="0" i="0">
+              <a:rPr sz="1750" b="0" i="0">
                 <a:solidFill>
                   <a:srgbClr val="242A33"/>
                 </a:solidFill>
@@ -14990,7 +14990,7 @@
               <a:t>　大量重复记录时把快排改成</a:t>
             </a:r>
             <a:r>
-              <a:rPr sz="2000" b="1" i="0">
+              <a:rPr sz="1750" b="1" i="0">
                 <a:solidFill>
                   <a:srgbClr val="12395B"/>
                 </a:solidFill>
@@ -15000,7 +15000,7 @@
               <a:t>三分数组</a:t>
             </a:r>
             <a:r>
-              <a:rPr sz="2000" b="0" i="0">
+              <a:rPr sz="1750" b="0" i="0">
                 <a:solidFill>
                   <a:srgbClr val="242A33"/>
                 </a:solidFill>
@@ -15019,11 +15019,11 @@
                 <a:spcPts val="0"/>
               </a:spcBef>
               <a:spcAft>
-                <a:spcPts val="1240"/>
-              </a:spcAft>
-            </a:pPr>
-            <a:r>
-              <a:rPr sz="2000" b="0" i="0">
+                <a:spcPts val="1085"/>
+              </a:spcAft>
+            </a:pPr>
+            <a:r>
+              <a:rPr sz="1750" b="0" i="0">
                 <a:solidFill>
                   <a:srgbClr val="242A33"/>
                 </a:solidFill>
@@ -15033,7 +15033,7 @@
               <a:t>•  </a:t>
             </a:r>
             <a:r>
-              <a:rPr sz="2000" b="1" i="0">
+              <a:rPr sz="1750" b="1" i="0">
                 <a:solidFill>
                   <a:srgbClr val="12395B"/>
                 </a:solidFill>
@@ -15043,7 +15043,7 @@
               <a:t>原书 12</a:t>
             </a:r>
             <a:r>
-              <a:rPr sz="2000" b="0" i="0">
+              <a:rPr sz="1750" b="0" i="0">
                 <a:solidFill>
                   <a:srgbClr val="242A33"/>
                 </a:solidFill>
@@ -15053,7 +15053,7 @@
               <a:t>　用栈代替递归；最差情况栈有多深？</a:t>
             </a:r>
             <a:r>
-              <a:rPr sz="2000" b="1" i="0">
+              <a:rPr sz="1750" b="1" i="0">
                 <a:solidFill>
                   <a:srgbClr val="12395B"/>
                 </a:solidFill>
@@ -15072,11 +15072,11 @@
                 <a:spcPts val="0"/>
               </a:spcBef>
               <a:spcAft>
-                <a:spcPts val="1240"/>
-              </a:spcAft>
-            </a:pPr>
-            <a:r>
-              <a:rPr sz="2000" b="0" i="0">
+                <a:spcPts val="1085"/>
+              </a:spcAft>
+            </a:pPr>
+            <a:r>
+              <a:rPr sz="1750" b="0" i="0">
                 <a:solidFill>
                   <a:srgbClr val="242A33"/>
                 </a:solidFill>
@@ -15086,7 +15086,7 @@
               <a:t>•  </a:t>
             </a:r>
             <a:r>
-              <a:rPr sz="2000" b="1" i="0">
+              <a:rPr sz="1750" b="1" i="0">
                 <a:solidFill>
                   <a:srgbClr val="12395B"/>
                 </a:solidFill>
@@ -15096,7 +15096,7 @@
               <a:t>上机 1</a:t>
             </a:r>
             <a:r>
-              <a:rPr sz="2000" b="0" i="0">
+              <a:rPr sz="1750" b="0" i="0">
                 <a:solidFill>
                   <a:srgbClr val="242A33"/>
                 </a:solidFill>
@@ -15104,6 +15104,79 @@
                 <a:ea typeface="微软雅黑"/>
               </a:rPr>
               <a:t>　复现 8.7.2 的两张实测表，并解释你机器上的数字与书上的差异</a:t>
+            </a:r>
+          </a:p>
+          <a:p>
+            <a:pPr algn="l">
+              <a:lnSpc>
+                <a:spcPct val="132000"/>
+              </a:lnSpc>
+              <a:spcBef>
+                <a:spcPts val="0"/>
+              </a:spcBef>
+              <a:spcAft>
+                <a:spcPts val="1085"/>
+              </a:spcAft>
+            </a:pPr>
+            <a:r>
+              <a:rPr sz="1750" b="0" i="0">
+                <a:solidFill>
+                  <a:srgbClr val="242A33"/>
+                </a:solidFill>
+                <a:latin typeface="Segoe UI"/>
+                <a:ea typeface="微软雅黑"/>
+              </a:rPr>
+              <a:t>•  </a:t>
+            </a:r>
+            <a:r>
+              <a:rPr sz="1750" b="1" i="0">
+                <a:solidFill>
+                  <a:srgbClr val="12395B"/>
+                </a:solidFill>
+                <a:latin typeface="Segoe UI"/>
+                <a:ea typeface="微软雅黑"/>
+              </a:rPr>
+              <a:t>这一页和讲义里都是选讲。</a:t>
+            </a:r>
+            <a:r>
+              <a:rPr sz="1750" b="0" i="0">
+                <a:solidFill>
+                  <a:srgbClr val="242A33"/>
+                </a:solidFill>
+                <a:latin typeface="Segoe UI"/>
+                <a:ea typeface="微软雅黑"/>
+              </a:rPr>
+              <a:t> 原书全部 </a:t>
+            </a:r>
+            <a:r>
+              <a:rPr sz="1750" b="1" i="0">
+                <a:solidFill>
+                  <a:srgbClr val="12395B"/>
+                </a:solidFill>
+                <a:latin typeface="Segoe UI"/>
+                <a:ea typeface="微软雅黑"/>
+              </a:rPr>
+              <a:t>345 道</a:t>
+            </a:r>
+            <a:r>
+              <a:rPr sz="1750" b="0" i="0">
+                <a:solidFill>
+                  <a:srgbClr val="242A33"/>
+                </a:solidFill>
+                <a:latin typeface="Segoe UI"/>
+                <a:ea typeface="微软雅黑"/>
+              </a:rPr>
+              <a:t>习题与上机题的参考答案，在 </a:t>
+            </a:r>
+            <a:r>
+              <a:rPr sz="1645" b="0" i="0">
+                <a:solidFill>
+                  <a:srgbClr val="242A33"/>
+                </a:solidFill>
+                <a:latin typeface="Consolas"/>
+                <a:ea typeface="Consolas"/>
+              </a:rPr>
+              <a:t>book/习题与参考答案.md</a:t>
             </a:r>
           </a:p>
         </p:txBody>
